--- a/courseware/DSA_CH05_Binary_Tree.pptx
+++ b/courseware/DSA_CH05_Binary_Tree.pptx
@@ -3335,7 +3335,7 @@
                 <a:latin typeface="Segoe UI"/>
                 <a:ea typeface="微软雅黑"/>
               </a:rPr>
-              <a:t>现代化重制版讲义　代码按 C++17 重写，全部可编译、可运行</a:t>
+              <a:t>现代化重制版讲义　代码按 C++17 重写；code/ 全部单元双档编译运行通过</a:t>
             </a:r>
           </a:p>
         </p:txBody>
@@ -18113,7 +18113,7 @@
                 <a:latin typeface="Segoe UI"/>
                 <a:ea typeface="微软雅黑"/>
               </a:rPr>
-              <a:t>习题（完整题面与参考答案见同名讲义）</a:t>
+              <a:t>习题选讲</a:t>
             </a:r>
           </a:p>
         </p:txBody>
@@ -18192,11 +18192,11 @@
                 <a:spcPts val="0"/>
               </a:spcBef>
               <a:spcAft>
-                <a:spcPts val="1240"/>
-              </a:spcAft>
-            </a:pPr>
-            <a:r>
-              <a:rPr sz="2000" b="0" i="0">
+                <a:spcPts val="1085"/>
+              </a:spcAft>
+            </a:pPr>
+            <a:r>
+              <a:rPr sz="1750" b="0" i="0">
                 <a:solidFill>
                   <a:srgbClr val="242A33"/>
                 </a:solidFill>
@@ -18206,7 +18206,7 @@
               <a:t>•  </a:t>
             </a:r>
             <a:r>
-              <a:rPr sz="2000" b="1" i="0">
+              <a:rPr sz="1750" b="1" i="0">
                 <a:solidFill>
                   <a:srgbClr val="12395B"/>
                 </a:solidFill>
@@ -18216,7 +18216,7 @@
               <a:t>补充 1</a:t>
             </a:r>
             <a:r>
-              <a:rPr sz="2000" b="0" i="0">
+              <a:rPr sz="1750" b="0" i="0">
                 <a:solidFill>
                   <a:srgbClr val="242A33"/>
                 </a:solidFill>
@@ -18226,7 +18226,7 @@
               <a:t>　「先序 + 后序总能唯一确定二叉树」成不成立？不成立就给</a:t>
             </a:r>
             <a:r>
-              <a:rPr sz="2000" b="1" i="0">
+              <a:rPr sz="1750" b="1" i="0">
                 <a:solidFill>
                   <a:srgbClr val="12395B"/>
                 </a:solidFill>
@@ -18245,11 +18245,11 @@
                 <a:spcPts val="0"/>
               </a:spcBef>
               <a:spcAft>
-                <a:spcPts val="1240"/>
-              </a:spcAft>
-            </a:pPr>
-            <a:r>
-              <a:rPr sz="2000" b="0" i="0">
+                <a:spcPts val="1085"/>
+              </a:spcAft>
+            </a:pPr>
+            <a:r>
+              <a:rPr sz="1750" b="0" i="0">
                 <a:solidFill>
                   <a:srgbClr val="242A33"/>
                 </a:solidFill>
@@ -18259,7 +18259,7 @@
               <a:t>•  </a:t>
             </a:r>
             <a:r>
-              <a:rPr sz="2000" b="1" i="0">
+              <a:rPr sz="1750" b="1" i="0">
                 <a:solidFill>
                   <a:srgbClr val="12395B"/>
                 </a:solidFill>
@@ -18269,7 +18269,7 @@
               <a:t>补充 2</a:t>
             </a:r>
             <a:r>
-              <a:rPr sz="2000" b="0" i="0">
+              <a:rPr sz="1750" b="0" i="0">
                 <a:solidFill>
                   <a:srgbClr val="242A33"/>
                 </a:solidFill>
@@ -18279,7 +18279,7 @@
               <a:t>　</a:t>
             </a:r>
             <a:r>
-              <a:rPr sz="1879" b="0" i="0">
+              <a:rPr sz="1645" b="0" i="0">
                 <a:solidFill>
                   <a:srgbClr val="242A33"/>
                 </a:solidFill>
@@ -18289,7 +18289,7 @@
               <a:t>O(n)</a:t>
             </a:r>
             <a:r>
-              <a:rPr sz="2000" b="0" i="0">
+              <a:rPr sz="1750" b="0" i="0">
                 <a:solidFill>
                   <a:srgbClr val="242A33"/>
                 </a:solidFill>
@@ -18299,7 +18299,7 @@
               <a:t> 判断数组是不是大顶堆，并说明</a:t>
             </a:r>
             <a:r>
-              <a:rPr sz="2000" b="1" i="0">
+              <a:rPr sz="1750" b="1" i="0">
                 <a:solidFill>
                   <a:srgbClr val="12395B"/>
                 </a:solidFill>
@@ -18318,11 +18318,11 @@
                 <a:spcPts val="0"/>
               </a:spcBef>
               <a:spcAft>
-                <a:spcPts val="1240"/>
-              </a:spcAft>
-            </a:pPr>
-            <a:r>
-              <a:rPr sz="2000" b="0" i="0">
+                <a:spcPts val="1085"/>
+              </a:spcAft>
+            </a:pPr>
+            <a:r>
+              <a:rPr sz="1750" b="0" i="0">
                 <a:solidFill>
                   <a:srgbClr val="242A33"/>
                 </a:solidFill>
@@ -18332,7 +18332,7 @@
               <a:t>•  </a:t>
             </a:r>
             <a:r>
-              <a:rPr sz="2000" b="1" i="0">
+              <a:rPr sz="1750" b="1" i="0">
                 <a:solidFill>
                   <a:srgbClr val="12395B"/>
                 </a:solidFill>
@@ -18342,7 +18342,7 @@
               <a:t>习题 2</a:t>
             </a:r>
             <a:r>
-              <a:rPr sz="2000" b="0" i="0">
+              <a:rPr sz="1750" b="0" i="0">
                 <a:solidFill>
                   <a:srgbClr val="242A33"/>
                 </a:solidFill>
@@ -18352,7 +18352,7 @@
               <a:t>　先序 </a:t>
             </a:r>
             <a:r>
-              <a:rPr sz="1879" b="0" i="0">
+              <a:rPr sz="1645" b="0" i="0">
                 <a:solidFill>
                   <a:srgbClr val="242A33"/>
                 </a:solidFill>
@@ -18362,7 +18362,7 @@
               <a:t>ABCDEFG</a:t>
             </a:r>
             <a:r>
-              <a:rPr sz="2000" b="0" i="0">
+              <a:rPr sz="1750" b="0" i="0">
                 <a:solidFill>
                   <a:srgbClr val="242A33"/>
                 </a:solidFill>
@@ -18372,7 +18372,7 @@
               <a:t>、中序 </a:t>
             </a:r>
             <a:r>
-              <a:rPr sz="1879" b="0" i="0">
+              <a:rPr sz="1645" b="0" i="0">
                 <a:solidFill>
                   <a:srgbClr val="242A33"/>
                 </a:solidFill>
@@ -18382,7 +18382,7 @@
               <a:t>CBDAFEG</a:t>
             </a:r>
             <a:r>
-              <a:rPr sz="2000" b="0" i="0">
+              <a:rPr sz="1750" b="0" i="0">
                 <a:solidFill>
                   <a:srgbClr val="242A33"/>
                 </a:solidFill>
@@ -18401,11 +18401,11 @@
                 <a:spcPts val="0"/>
               </a:spcBef>
               <a:spcAft>
-                <a:spcPts val="1240"/>
-              </a:spcAft>
-            </a:pPr>
-            <a:r>
-              <a:rPr sz="2000" b="0" i="0">
+                <a:spcPts val="1085"/>
+              </a:spcAft>
+            </a:pPr>
+            <a:r>
+              <a:rPr sz="1750" b="0" i="0">
                 <a:solidFill>
                   <a:srgbClr val="242A33"/>
                 </a:solidFill>
@@ -18415,7 +18415,7 @@
               <a:t>•  </a:t>
             </a:r>
             <a:r>
-              <a:rPr sz="2000" b="1" i="0">
+              <a:rPr sz="1750" b="1" i="0">
                 <a:solidFill>
                   <a:srgbClr val="12395B"/>
                 </a:solidFill>
@@ -18425,7 +18425,7 @@
               <a:t>习题 3 / 4</a:t>
             </a:r>
             <a:r>
-              <a:rPr sz="2000" b="0" i="0">
+              <a:rPr sz="1750" b="0" i="0">
                 <a:solidFill>
                   <a:srgbClr val="242A33"/>
                 </a:solidFill>
@@ -18444,11 +18444,11 @@
                 <a:spcPts val="0"/>
               </a:spcBef>
               <a:spcAft>
-                <a:spcPts val="1240"/>
-              </a:spcAft>
-            </a:pPr>
-            <a:r>
-              <a:rPr sz="2000" b="0" i="0">
+                <a:spcPts val="1085"/>
+              </a:spcAft>
+            </a:pPr>
+            <a:r>
+              <a:rPr sz="1750" b="0" i="0">
                 <a:solidFill>
                   <a:srgbClr val="242A33"/>
                 </a:solidFill>
@@ -18458,7 +18458,7 @@
               <a:t>•  </a:t>
             </a:r>
             <a:r>
-              <a:rPr sz="2000" b="1" i="0">
+              <a:rPr sz="1750" b="1" i="0">
                 <a:solidFill>
                   <a:srgbClr val="12395B"/>
                 </a:solidFill>
@@ -18468,7 +18468,7 @@
               <a:t>习题 6</a:t>
             </a:r>
             <a:r>
-              <a:rPr sz="2000" b="0" i="0">
+              <a:rPr sz="1750" b="0" i="0">
                 <a:solidFill>
                   <a:srgbClr val="242A33"/>
                 </a:solidFill>
@@ -18487,11 +18487,11 @@
                 <a:spcPts val="0"/>
               </a:spcBef>
               <a:spcAft>
-                <a:spcPts val="1240"/>
-              </a:spcAft>
-            </a:pPr>
-            <a:r>
-              <a:rPr sz="2000" b="0" i="0">
+                <a:spcPts val="1085"/>
+              </a:spcAft>
+            </a:pPr>
+            <a:r>
+              <a:rPr sz="1750" b="0" i="0">
                 <a:solidFill>
                   <a:srgbClr val="242A33"/>
                 </a:solidFill>
@@ -18501,7 +18501,7 @@
               <a:t>•  </a:t>
             </a:r>
             <a:r>
-              <a:rPr sz="2000" b="1" i="0">
+              <a:rPr sz="1750" b="1" i="0">
                 <a:solidFill>
                   <a:srgbClr val="12395B"/>
                 </a:solidFill>
@@ -18511,7 +18511,7 @@
               <a:t>原书 8</a:t>
             </a:r>
             <a:r>
-              <a:rPr sz="2000" b="0" i="0">
+              <a:rPr sz="1750" b="0" i="0">
                 <a:solidFill>
                   <a:srgbClr val="242A33"/>
                 </a:solidFill>
@@ -18521,7 +18521,7 @@
               <a:t>　给定两个结点指针，求它们</a:t>
             </a:r>
             <a:r>
-              <a:rPr sz="2000" b="1" i="0">
+              <a:rPr sz="1750" b="1" i="0">
                 <a:solidFill>
                   <a:srgbClr val="12395B"/>
                 </a:solidFill>
@@ -18540,11 +18540,11 @@
                 <a:spcPts val="0"/>
               </a:spcBef>
               <a:spcAft>
-                <a:spcPts val="1240"/>
-              </a:spcAft>
-            </a:pPr>
-            <a:r>
-              <a:rPr sz="2000" b="0" i="0">
+                <a:spcPts val="1085"/>
+              </a:spcAft>
+            </a:pPr>
+            <a:r>
+              <a:rPr sz="1750" b="0" i="0">
                 <a:solidFill>
                   <a:srgbClr val="242A33"/>
                 </a:solidFill>
@@ -18554,7 +18554,7 @@
               <a:t>•  </a:t>
             </a:r>
             <a:r>
-              <a:rPr sz="2000" b="1" i="0">
+              <a:rPr sz="1750" b="1" i="0">
                 <a:solidFill>
                   <a:srgbClr val="12395B"/>
                 </a:solidFill>
@@ -18564,7 +18564,7 @@
               <a:t>原书 19</a:t>
             </a:r>
             <a:r>
-              <a:rPr sz="2000" b="0" i="0">
+              <a:rPr sz="1750" b="0" i="0">
                 <a:solidFill>
                   <a:srgbClr val="242A33"/>
                 </a:solidFill>
@@ -18574,7 +18574,7 @@
               <a:t>　对 </a:t>
             </a:r>
             <a:r>
-              <a:rPr sz="1879" b="0" i="0">
+              <a:rPr sz="1645" b="0" i="0">
                 <a:solidFill>
                   <a:srgbClr val="242A33"/>
                 </a:solidFill>
@@ -18584,7 +18584,7 @@
               <a:t>{E,D,X,K,H,L,M,C,P}</a:t>
             </a:r>
             <a:r>
-              <a:rPr sz="2000" b="0" i="0">
+              <a:rPr sz="1750" b="0" i="0">
                 <a:solidFill>
                   <a:srgbClr val="242A33"/>
                 </a:solidFill>
@@ -18594,7 +18594,7 @@
               <a:t> 用筛选法建最小堆，并数</a:t>
             </a:r>
             <a:r>
-              <a:rPr sz="2000" b="1" i="0">
+              <a:rPr sz="1750" b="1" i="0">
                 <a:solidFill>
                   <a:srgbClr val="12395B"/>
                 </a:solidFill>
@@ -18613,11 +18613,11 @@
                 <a:spcPts val="0"/>
               </a:spcBef>
               <a:spcAft>
-                <a:spcPts val="1240"/>
-              </a:spcAft>
-            </a:pPr>
-            <a:r>
-              <a:rPr sz="2000" b="0" i="0">
+                <a:spcPts val="1085"/>
+              </a:spcAft>
+            </a:pPr>
+            <a:r>
+              <a:rPr sz="1750" b="0" i="0">
                 <a:solidFill>
                   <a:srgbClr val="242A33"/>
                 </a:solidFill>
@@ -18627,7 +18627,7 @@
               <a:t>•  </a:t>
             </a:r>
             <a:r>
-              <a:rPr sz="2000" b="1" i="0">
+              <a:rPr sz="1750" b="1" i="0">
                 <a:solidFill>
                   <a:srgbClr val="12395B"/>
                 </a:solidFill>
@@ -18637,7 +18637,7 @@
               <a:t>上机</a:t>
             </a:r>
             <a:r>
-              <a:rPr sz="2000" b="0" i="0">
+              <a:rPr sz="1750" b="0" i="0">
                 <a:solidFill>
                   <a:srgbClr val="242A33"/>
                 </a:solidFill>
@@ -18645,6 +18645,79 @@
                 <a:ea typeface="微软雅黑"/>
               </a:rPr>
               <a:t>　表达式二叉树：读入一种表达式，建树，输出另外两种</a:t>
+            </a:r>
+          </a:p>
+          <a:p>
+            <a:pPr algn="l">
+              <a:lnSpc>
+                <a:spcPct val="132000"/>
+              </a:lnSpc>
+              <a:spcBef>
+                <a:spcPts val="0"/>
+              </a:spcBef>
+              <a:spcAft>
+                <a:spcPts val="1085"/>
+              </a:spcAft>
+            </a:pPr>
+            <a:r>
+              <a:rPr sz="1750" b="0" i="0">
+                <a:solidFill>
+                  <a:srgbClr val="242A33"/>
+                </a:solidFill>
+                <a:latin typeface="Segoe UI"/>
+                <a:ea typeface="微软雅黑"/>
+              </a:rPr>
+              <a:t>•  </a:t>
+            </a:r>
+            <a:r>
+              <a:rPr sz="1750" b="1" i="0">
+                <a:solidFill>
+                  <a:srgbClr val="12395B"/>
+                </a:solidFill>
+                <a:latin typeface="Segoe UI"/>
+                <a:ea typeface="微软雅黑"/>
+              </a:rPr>
+              <a:t>这一页和讲义里都是选讲。</a:t>
+            </a:r>
+            <a:r>
+              <a:rPr sz="1750" b="0" i="0">
+                <a:solidFill>
+                  <a:srgbClr val="242A33"/>
+                </a:solidFill>
+                <a:latin typeface="Segoe UI"/>
+                <a:ea typeface="微软雅黑"/>
+              </a:rPr>
+              <a:t> 原书全部 </a:t>
+            </a:r>
+            <a:r>
+              <a:rPr sz="1750" b="1" i="0">
+                <a:solidFill>
+                  <a:srgbClr val="12395B"/>
+                </a:solidFill>
+                <a:latin typeface="Segoe UI"/>
+                <a:ea typeface="微软雅黑"/>
+              </a:rPr>
+              <a:t>345 道</a:t>
+            </a:r>
+            <a:r>
+              <a:rPr sz="1750" b="0" i="0">
+                <a:solidFill>
+                  <a:srgbClr val="242A33"/>
+                </a:solidFill>
+                <a:latin typeface="Segoe UI"/>
+                <a:ea typeface="微软雅黑"/>
+              </a:rPr>
+              <a:t>习题与上机题的参考答案，在 </a:t>
+            </a:r>
+            <a:r>
+              <a:rPr sz="1645" b="0" i="0">
+                <a:solidFill>
+                  <a:srgbClr val="242A33"/>
+                </a:solidFill>
+                <a:latin typeface="Consolas"/>
+                <a:ea typeface="Consolas"/>
+              </a:rPr>
+              <a:t>book/习题与参考答案.md</a:t>
             </a:r>
           </a:p>
         </p:txBody>
